--- a/slides/Week4_Governance_Optimization.pptx
+++ b/slides/Week4_Governance_Optimization.pptx
@@ -514,10 +514,8 @@
           <a:lstStyle/>
           <a:p>
             <a:r>
-              <a:rPr lang="en-US" dirty="0"/>
-              <a:t>Quick Week 3 retrieval first (CLI verbs, repair semantics, trigger trio). Reframe: everything so far assumed you could see all the data — real orgs don't work that way, and neither does the exam. These are the two most UNDER-studied domains.</a:t>
-            </a:r>
-            <a:endParaRPr lang="en-US" dirty="0"/>
+              <a:t>Run the Week 4 STARTER quiz first (Markdown Mash, 5 Qs on Week 3: repair semantics, triggers, CLI verbs, PR location, widgets). Then reframe: everything so far assumed you could see all the data — real orgs don't work that way, and neither does the exam. These are the two most UNDER-studied domains. Tonight: the 45-question mock goes home with them.</a:t>
+            </a:r>
           </a:p>
         </p:txBody>
       </p:sp>
@@ -778,10 +776,14 @@
           <a:lstStyle/>
           <a:p>
             <a:r>
-              <a:rPr lang="en-US" dirty="0"/>
               <a:t>The four parameters are listed BY NAME in the outline — memorization targets, direction matters not magic numbers. The failure triage master key: did it fail BEFORE any work (infra/library) or DURING (data/memory)? collect()/toPandas() kills the DRIVER — executors look healthy; that's the planted clue.</a:t>
             </a:r>
-            <a:endParaRPr lang="en-US" dirty="0"/>
+          </a:p>
+          <a:p/>
+          <a:p>
+            <a:r>
+              <a:t>PLATFORM CALLBACK (Domain 1, 2 min — notebook 2.10): control plane = Databricks-managed (UI, scheduler, UC metastore); compute plane = where code runs — classic in the CUSTOMER'S cloud account, serverless in Databricks-managed. Infra failures on this slide happen in the compute plane; your grants/lineage live in the control plane. Cheap exam points.</a:t>
+            </a:r>
           </a:p>
         </p:txBody>
       </p:sp>
@@ -1218,10 +1220,14 @@
           <a:lstStyle/>
           <a:p>
             <a:r>
-              <a:rPr lang="en-US" dirty="0"/>
               <a:t>Quiz the room cold on DROP semantics — should be instant by Week 4. New material: UNDROP (managed drops recoverable within a retention window) and conversion existence. Depth on conversion syntax is low-yield; know it's possible and what changes.</a:t>
             </a:r>
-            <a:endParaRPr lang="en-US" dirty="0"/>
+          </a:p>
+          <a:p/>
+          <a:p>
+            <a:r>
+              <a:t>NEW: the notebook now has a hands-on UNDROP drill (demo 2.8) — drop and recover a scratch managed table live, plus VACUUM and TIMESTAMP AS OF. Don't just assert these; run them.</a:t>
+            </a:r>
           </a:p>
         </p:txBody>
       </p:sp>
@@ -1658,10 +1664,14 @@
           <a:lstStyle/>
           <a:p>
             <a:r>
-              <a:rPr lang="en-US" dirty="0"/>
               <a:t>Physical truth: tables are files; speed is layout. OPTIMIZE compacts small files (the streaming-append disease). VACUUM reclaims storage and TRIMS TIME TRAVEL — swapped purposes are a standard distractor. Liquid Clustering replaces partitioning AND Z-order: keys changeable without rewrite.</a:t>
             </a:r>
-            <a:endParaRPr lang="en-US" dirty="0"/>
+          </a:p>
+          <a:p/>
+          <a:p>
+            <a:r>
+              <a:t>NEW: notebook demo 2.8 runs VACUUM live (it deletes ~nothing — everything is inside retention; the command shape is the target) and does the DROP→UNDROP + TIMESTAMP AS OF drill.</a:t>
+            </a:r>
           </a:p>
         </p:txBody>
       </p:sp>
